--- a/AI_Usecases/AI-2-Types.pptx
+++ b/AI_Usecases/AI-2-Types.pptx
@@ -219,7 +219,7 @@
           <a:p>
             <a:fld id="{7BAEECA8-D063-486F-AE31-5020270C1449}" type="datetimeFigureOut">
               <a:rPr lang="en-US" smtClean="0"/>
-              <a:t>5/27/2026</a:t>
+              <a:t>8/1/2026</a:t>
             </a:fld>
             <a:endParaRPr lang="en-US"/>
           </a:p>
@@ -396,7 +396,7 @@
           <a:p>
             <a:fld id="{CB233BD1-3BA8-448D-9D08-7846095EA517}" type="datetimeFigureOut">
               <a:rPr lang="en-US" smtClean="0"/>
-              <a:t>5/27/2026</a:t>
+              <a:t>8/1/2026</a:t>
             </a:fld>
             <a:endParaRPr lang="en-US"/>
           </a:p>
@@ -810,7 +810,7 @@
           <a:p>
             <a:fld id="{6383FAE1-13DE-4511-8C1B-C8AFB720664C}" type="datetimeFigureOut">
               <a:rPr lang="en-US" smtClean="0"/>
-              <a:t>5/27/2026</a:t>
+              <a:t>8/1/2026</a:t>
             </a:fld>
             <a:endParaRPr lang="en-US"/>
           </a:p>
@@ -1008,7 +1008,7 @@
           <a:p>
             <a:fld id="{6383FAE1-13DE-4511-8C1B-C8AFB720664C}" type="datetimeFigureOut">
               <a:rPr lang="en-US" smtClean="0"/>
-              <a:t>5/27/2026</a:t>
+              <a:t>8/1/2026</a:t>
             </a:fld>
             <a:endParaRPr lang="en-US"/>
           </a:p>
@@ -1216,7 +1216,7 @@
           <a:p>
             <a:fld id="{6383FAE1-13DE-4511-8C1B-C8AFB720664C}" type="datetimeFigureOut">
               <a:rPr lang="en-US" smtClean="0"/>
-              <a:t>5/27/2026</a:t>
+              <a:t>8/1/2026</a:t>
             </a:fld>
             <a:endParaRPr lang="en-US"/>
           </a:p>
@@ -1414,7 +1414,7 @@
           <a:p>
             <a:fld id="{6383FAE1-13DE-4511-8C1B-C8AFB720664C}" type="datetimeFigureOut">
               <a:rPr lang="en-US" smtClean="0"/>
-              <a:t>5/27/2026</a:t>
+              <a:t>8/1/2026</a:t>
             </a:fld>
             <a:endParaRPr lang="en-US"/>
           </a:p>
@@ -1689,7 +1689,7 @@
           <a:p>
             <a:fld id="{6383FAE1-13DE-4511-8C1B-C8AFB720664C}" type="datetimeFigureOut">
               <a:rPr lang="en-US" smtClean="0"/>
-              <a:t>5/27/2026</a:t>
+              <a:t>8/1/2026</a:t>
             </a:fld>
             <a:endParaRPr lang="en-US"/>
           </a:p>
@@ -1954,7 +1954,7 @@
           <a:p>
             <a:fld id="{6383FAE1-13DE-4511-8C1B-C8AFB720664C}" type="datetimeFigureOut">
               <a:rPr lang="en-US" smtClean="0"/>
-              <a:t>5/27/2026</a:t>
+              <a:t>8/1/2026</a:t>
             </a:fld>
             <a:endParaRPr lang="en-US"/>
           </a:p>
@@ -2366,7 +2366,7 @@
           <a:p>
             <a:fld id="{6383FAE1-13DE-4511-8C1B-C8AFB720664C}" type="datetimeFigureOut">
               <a:rPr lang="en-US" smtClean="0"/>
-              <a:t>5/27/2026</a:t>
+              <a:t>8/1/2026</a:t>
             </a:fld>
             <a:endParaRPr lang="en-US"/>
           </a:p>
@@ -2507,7 +2507,7 @@
           <a:p>
             <a:fld id="{6383FAE1-13DE-4511-8C1B-C8AFB720664C}" type="datetimeFigureOut">
               <a:rPr lang="en-US" smtClean="0"/>
-              <a:t>5/27/2026</a:t>
+              <a:t>8/1/2026</a:t>
             </a:fld>
             <a:endParaRPr lang="en-US"/>
           </a:p>
@@ -2620,7 +2620,7 @@
           <a:p>
             <a:fld id="{6383FAE1-13DE-4511-8C1B-C8AFB720664C}" type="datetimeFigureOut">
               <a:rPr lang="en-US" smtClean="0"/>
-              <a:t>5/27/2026</a:t>
+              <a:t>8/1/2026</a:t>
             </a:fld>
             <a:endParaRPr lang="en-US"/>
           </a:p>
@@ -2931,7 +2931,7 @@
           <a:p>
             <a:fld id="{6383FAE1-13DE-4511-8C1B-C8AFB720664C}" type="datetimeFigureOut">
               <a:rPr lang="en-US" smtClean="0"/>
-              <a:t>5/27/2026</a:t>
+              <a:t>8/1/2026</a:t>
             </a:fld>
             <a:endParaRPr lang="en-US"/>
           </a:p>
@@ -3222,7 +3222,7 @@
           <a:p>
             <a:fld id="{6383FAE1-13DE-4511-8C1B-C8AFB720664C}" type="datetimeFigureOut">
               <a:rPr lang="en-US" smtClean="0"/>
-              <a:t>5/27/2026</a:t>
+              <a:t>8/1/2026</a:t>
             </a:fld>
             <a:endParaRPr lang="en-US"/>
           </a:p>
@@ -3466,7 +3466,7 @@
           <a:p>
             <a:fld id="{6383FAE1-13DE-4511-8C1B-C8AFB720664C}" type="datetimeFigureOut">
               <a:rPr lang="en-US" smtClean="0"/>
-              <a:t>5/27/2026</a:t>
+              <a:t>8/1/2026</a:t>
             </a:fld>
             <a:endParaRPr lang="en-US"/>
           </a:p>
@@ -4126,7 +4126,7 @@
         </p:nvSpPr>
         <p:spPr>
           <a:xfrm>
-            <a:off x="320040" y="166401"/>
+            <a:off x="394716" y="1172241"/>
             <a:ext cx="11402568" cy="4847289"/>
           </a:xfrm>
           <a:prstGeom prst="rect">
@@ -4551,8 +4551,8 @@
         </p:nvSpPr>
         <p:spPr>
           <a:xfrm>
-            <a:off x="320040" y="166401"/>
-            <a:ext cx="11402568" cy="6001643"/>
+            <a:off x="137160" y="1035081"/>
+            <a:ext cx="11402568" cy="5262979"/>
           </a:xfrm>
           <a:prstGeom prst="rect">
             <a:avLst/>
@@ -4656,7 +4656,10 @@
             </a:endParaRPr>
           </a:p>
           <a:p>
-            <a:pPr lvl="0"/>
+            <a:pPr marL="342900" lvl="0" indent="-342900">
+              <a:buFont typeface="Arial" panose="020B0604020202020204" pitchFamily="34" charset="0"/>
+              <a:buChar char="•"/>
+            </a:pPr>
             <a:r>
               <a:rPr lang="en-IN" sz="2400" b="1" dirty="0">
                 <a:solidFill>
@@ -4704,17 +4707,6 @@
           </a:p>
           <a:p>
             <a:pPr lvl="0"/>
-            <a:endParaRPr lang="en-IN" sz="2400" dirty="0">
-              <a:solidFill>
-                <a:schemeClr val="accent6">
-                  <a:lumMod val="40000"/>
-                  <a:lumOff val="60000"/>
-                </a:schemeClr>
-              </a:solidFill>
-            </a:endParaRPr>
-          </a:p>
-          <a:p>
-            <a:pPr lvl="0"/>
             <a:r>
               <a:rPr lang="en-IN" sz="2400" dirty="0">
                 <a:solidFill>
@@ -4761,7 +4753,10 @@
             </a:endParaRPr>
           </a:p>
           <a:p>
-            <a:pPr lvl="0"/>
+            <a:pPr marL="342900" lvl="0" indent="-342900">
+              <a:buFont typeface="Arial" panose="020B0604020202020204" pitchFamily="34" charset="0"/>
+              <a:buChar char="•"/>
+            </a:pPr>
             <a:r>
               <a:rPr lang="en-IN" sz="2400" b="1" dirty="0">
                 <a:solidFill>
@@ -4794,17 +4789,6 @@
                 </a:solidFill>
               </a:rPr>
               <a:t>apply that knowledge to unfamiliar scenarios</a:t>
-            </a:r>
-            <a:r>
-              <a:rPr lang="en-IN" sz="2400" dirty="0">
-                <a:solidFill>
-                  <a:schemeClr val="accent6">
-                    <a:lumMod val="40000"/>
-                    <a:lumOff val="60000"/>
-                  </a:schemeClr>
-                </a:solidFill>
-              </a:rPr>
-              <a:t>, enabling them to navigate and solve complex challenges efficiently. </a:t>
             </a:r>
             <a:endParaRPr lang="en-US" sz="2400" dirty="0">
               <a:solidFill>
@@ -4867,8 +4851,8 @@
         </p:nvSpPr>
         <p:spPr>
           <a:xfrm>
-            <a:off x="320040" y="166401"/>
-            <a:ext cx="11402568" cy="6001643"/>
+            <a:off x="192024" y="993517"/>
+            <a:ext cx="11402568" cy="5632311"/>
           </a:xfrm>
           <a:prstGeom prst="rect">
             <a:avLst/>
@@ -4890,7 +4874,7 @@
                   </a:schemeClr>
                 </a:solidFill>
               </a:rPr>
-              <a:t> </a:t>
+              <a:t> 3) </a:t>
             </a:r>
             <a:r>
               <a:rPr lang="en-IN" sz="2400" b="1" dirty="0">
@@ -4977,29 +4961,7 @@
                   </a:schemeClr>
                 </a:solidFill>
               </a:rPr>
-              <a:t>, </a:t>
-            </a:r>
-            <a:r>
-              <a:rPr lang="en-US" sz="2400">
-                <a:solidFill>
-                  <a:schemeClr val="accent6">
-                    <a:lumMod val="40000"/>
-                    <a:lumOff val="60000"/>
-                  </a:schemeClr>
-                </a:solidFill>
-              </a:rPr>
-              <a:t>and </a:t>
-            </a:r>
-            <a:r>
-              <a:rPr lang="en-US" sz="2400" b="1" i="1">
-                <a:solidFill>
-                  <a:schemeClr val="accent6">
-                    <a:lumMod val="40000"/>
-                    <a:lumOff val="60000"/>
-                  </a:schemeClr>
-                </a:solidFill>
-              </a:rPr>
-              <a:t>make </a:t>
+              <a:t>, and </a:t>
             </a:r>
             <a:r>
               <a:rPr lang="en-US" sz="2400" b="1" i="1" dirty="0">
@@ -5010,7 +4972,7 @@
                   </a:schemeClr>
                 </a:solidFill>
               </a:rPr>
-              <a:t>predictions with high accuracy.</a:t>
+              <a:t>make predictions with high accuracy.</a:t>
             </a:r>
           </a:p>
           <a:p>
@@ -5063,7 +5025,7 @@
                   </a:schemeClr>
                 </a:solidFill>
               </a:rPr>
-              <a:t>, leading to rapid and continuous improvement.</a:t>
+              <a:t>, leading to continuous improvement.</a:t>
             </a:r>
           </a:p>
           <a:p>
@@ -5180,7 +5142,7 @@
                   </a:schemeClr>
                 </a:solidFill>
               </a:rPr>
-              <a:t> allowing it to analyze vast amounts of data and perform complex computations at unprecedented speeds.</a:t>
+              <a:t> allowing it to analyze vast amounts of data and perform complex computations.</a:t>
             </a:r>
           </a:p>
         </p:txBody>
